--- a/보장분석지_김선우.pptx
+++ b/보장분석지_김선우.pptx
@@ -3690,7 +3690,7 @@
                 <a:latin typeface="HY엽서M" panose="02030600000101010101" pitchFamily="18" charset="-127"/>
                 <a:ea typeface="HY엽서M" panose="02030600000101010101" pitchFamily="18" charset="-127"/>
               </a:rPr>
-              <a:t>2026년 07월 02일 기준</a:t>
+              <a:t>2026년 07월 03일 기준</a:t>
             </a:r>
           </a:p>
         </p:txBody>
@@ -6879,16 +6879,6 @@
               </a:rPr>
               <a:t>: 5,000</a:t>
             </a:r>
-            <a:r>
-              <a:rPr lang="en-US" altLang="ko-KR" sz="1200">
-                <a:solidFill>
-                  <a:srgbClr val="000000"/>
-                </a:solidFill>
-                <a:latin typeface="HY엽서M" panose="02030600000101010101" pitchFamily="18" charset="-127"/>
-                <a:ea typeface="HY엽서M" panose="02030600000101010101" pitchFamily="18" charset="-127"/>
-              </a:rPr>
-              <a:t>+5,000</a:t>
-            </a:r>
           </a:p>
           <a:p>
             <a:r>
@@ -6906,7 +6896,7 @@
                 <a:latin typeface="HY엽서M" panose="02030600000101010101" pitchFamily="18" charset="-127"/>
                 <a:ea typeface="HY엽서M" panose="02030600000101010101" pitchFamily="18" charset="-127"/>
               </a:rPr>
-              <a:t>: 200 / </a:t>
+              <a:t>: 100 / </a:t>
             </a:r>
             <a:r>
               <a:rPr lang="ko-KR" altLang="en-US" sz="1050" dirty="0" err="1">
@@ -7513,7 +7503,7 @@
                 <a:latin typeface="HY엽서M" panose="02030600000101010101" pitchFamily="18" charset="-127"/>
                 <a:ea typeface="HY엽서M" panose="02030600000101010101" pitchFamily="18" charset="-127"/>
               </a:rPr>
-              <a:t>: 105</a:t>
+              <a:t>: 100</a:t>
             </a:r>
           </a:p>
           <a:p>
